--- a/poc-egress-kuadrant/poc-egreso-kuadrant-gerencial-2026-08.pptx
+++ b/poc-egress-kuadrant/poc-egreso-kuadrant-gerencial-2026-08.pptx
@@ -3474,7 +3474,7 @@
                 <a:ea typeface="Calibri" pitchFamily="34" charset="-122"/>
                 <a:cs typeface="Calibri" pitchFamily="34" charset="-120"/>
               </a:rPr>
-              <a:t>EL ÚNICO BLOQUEANTE</a:t>
+              <a:t>LO ÚNICO QUE FALTA</a:t>
             </a:r>
             <a:endParaRPr lang="en-US" sz="1300" dirty="0"/>
           </a:p>
@@ -3516,7 +3516,7 @@
                 <a:ea typeface="Cambria" pitchFamily="34" charset="-122"/>
                 <a:cs typeface="Cambria" pitchFamily="34" charset="-120"/>
               </a:rPr>
-              <a:t>No hay camino de red</a:t>
+              <a:t>Sincronizar una clave</a:t>
             </a:r>
             <a:endParaRPr lang="en-US" sz="3800" dirty="0"/>
           </a:p>
@@ -3536,7 +3536,7 @@
                 <a:ea typeface="Cambria" pitchFamily="34" charset="-122"/>
                 <a:cs typeface="Cambria" pitchFamily="34" charset="-120"/>
               </a:rPr>
-              <a:t>hacia el cluster destino</a:t>
+              <a:t>en el cluster destino</a:t>
             </a:r>
             <a:endParaRPr lang="en-US" sz="3800" dirty="0"/>
           </a:p>
@@ -3578,7 +3578,7 @@
                 <a:ea typeface="Calibri" pitchFamily="34" charset="-122"/>
                 <a:cs typeface="Calibri" pitchFamily="34" charset="-120"/>
               </a:rPr>
-              <a:t>El nombre resuelve y no hay proxy en el medio, pero las conexiones al cluster de AWS no llegan — ni desde los servidores ni desde el bastión. Es un pedido de habilitación a la red corporativa, no un problema de la plataforma.</a:t>
+              <a:t>El cluster destino ya está desplegado, es alcanzable desde el origen y su control de acceso está activo. Pero la clave pública que tiene cargada quedó de una versión anterior de la prueba, así que todavía rechaza las credenciales que emitimos.</a:t>
             </a:r>
             <a:endParaRPr lang="en-US" sz="1600" dirty="0"/>
           </a:p>
@@ -3651,7 +3651,7 @@
                 <a:ea typeface="Cambria" pitchFamily="34" charset="-122"/>
                 <a:cs typeface="Cambria" pitchFamily="34" charset="-120"/>
               </a:rPr>
-              <a:t>Mientras tanto, la prueba se completó contra un destino simulado dentro del mismo cluster.</a:t>
+              <a:t>Es un cambio de configuración de minutos, y no depende de nuestro equipo.</a:t>
             </a:r>
             <a:endParaRPr lang="en-US" sz="1600" dirty="0"/>
           </a:p>
@@ -3693,7 +3693,7 @@
                 <a:ea typeface="Calibri" pitchFamily="34" charset="-122"/>
                 <a:cs typeface="Calibri" pitchFamily="34" charset="-120"/>
               </a:rPr>
-              <a:t>Eso permitió validar todo salvo la latencia entre clusters y la diferencia de reloj entre ellos. Ambas quedan pendientes de la habilitación de red.</a:t>
+              <a:t>La prueba se completó contra un destino simulado dentro del mismo cluster, lo que permitió validar todo salvo la latencia entre clusters y la diferencia de reloj entre ellos.</a:t>
             </a:r>
             <a:endParaRPr lang="en-US" sz="1400" dirty="0"/>
           </a:p>
@@ -4080,7 +4080,7 @@
                 <a:ea typeface="Cambria" pitchFamily="34" charset="-122"/>
                 <a:cs typeface="Cambria" pitchFamily="34" charset="-120"/>
               </a:rPr>
-              <a:t>Pedir la habilitación de red</a:t>
+              <a:t>Cerrar la prueba con el cluster real</a:t>
             </a:r>
             <a:endParaRPr lang="en-US" sz="1800" dirty="0"/>
           </a:p>
@@ -4122,7 +4122,7 @@
                 <a:ea typeface="Calibri" pitchFamily="34" charset="-122"/>
                 <a:cs typeface="Calibri" pitchFamily="34" charset="-120"/>
               </a:rPr>
-              <a:t>Es el único bloqueante para completar la prueba con el cluster real. Sin eso no se puede medir latencia ni programar la migración.</a:t>
+              <a:t>Pedir la sincronización de la clave en el destino. Es lo único que falta para medir latencia real y programar la migración.</a:t>
             </a:r>
             <a:endParaRPr lang="en-US" sz="1350" dirty="0"/>
           </a:p>

--- a/poc-egress-kuadrant/poc-egreso-kuadrant-gerencial-2026-08.pptx
+++ b/poc-egress-kuadrant/poc-egreso-kuadrant-gerencial-2026-08.pptx
@@ -4480,7 +4480,7 @@
                 <a:ea typeface="Calibri" pitchFamily="34" charset="-122"/>
                 <a:cs typeface="Calibri" pitchFamily="34" charset="-120"/>
               </a:rPr>
-              <a:t>Falta resolver la identidad del consumidor y el aislamiento de la clave entre equipos. Para un primer caso puntual, sirve como está.</a:t>
+              <a:t>Falta resolver la identidad del consumidor, el aislamiento de la clave entre equipos y el esquema de nombres para el tráfico entre clusters. Para un primer caso puntual, sirve como está.</a:t>
             </a:r>
             <a:endParaRPr lang="en-US" sz="1350" dirty="0"/>
           </a:p>
